--- a/2025/01-1 Введение в АВР.pptx
+++ b/2025/01-1 Введение в АВР.pptx
@@ -222,7 +222,7 @@
           <a:p>
             <a:fld id="{CDA96C9A-3213-B245-BC64-7E419D14BD9D}" type="datetimeFigureOut">
               <a:rPr lang="ru-RU" smtClean="0"/>
-              <a:t>15.07.2025</a:t>
+              <a:t>21.07.2025</a:t>
             </a:fld>
             <a:endParaRPr lang="ru-RU"/>
           </a:p>
@@ -1381,7 +1381,7 @@
           <a:p>
             <a:fld id="{BEE214BE-636D-8A45-BCA6-8B7ED77AA124}" type="datetime1">
               <a:rPr lang="ru-RU" smtClean="0"/>
-              <a:t>15.07.2025</a:t>
+              <a:t>21.07.2025</a:t>
             </a:fld>
             <a:endParaRPr lang="en-US"/>
           </a:p>
@@ -1551,7 +1551,7 @@
           <a:p>
             <a:fld id="{5855274A-4ED4-0146-A3E9-88EF200B5196}" type="datetime1">
               <a:rPr lang="ru-RU" smtClean="0"/>
-              <a:t>15.07.2025</a:t>
+              <a:t>21.07.2025</a:t>
             </a:fld>
             <a:endParaRPr lang="en-US"/>
           </a:p>
@@ -1731,7 +1731,7 @@
           <a:p>
             <a:fld id="{8A78DFF1-9FDC-144B-973E-B4B4609709DF}" type="datetime1">
               <a:rPr lang="ru-RU" smtClean="0"/>
-              <a:t>15.07.2025</a:t>
+              <a:t>21.07.2025</a:t>
             </a:fld>
             <a:endParaRPr lang="en-US"/>
           </a:p>
@@ -1901,7 +1901,7 @@
           <a:p>
             <a:fld id="{8233A339-F8AE-5C45-BEAE-07EF9DC78B60}" type="datetime1">
               <a:rPr lang="ru-RU" smtClean="0"/>
-              <a:t>15.07.2025</a:t>
+              <a:t>21.07.2025</a:t>
             </a:fld>
             <a:endParaRPr lang="en-US"/>
           </a:p>
@@ -2147,7 +2147,7 @@
           <a:p>
             <a:fld id="{7586FDE4-97E0-CE4A-988C-F30B221290A7}" type="datetime1">
               <a:rPr lang="ru-RU" smtClean="0"/>
-              <a:t>15.07.2025</a:t>
+              <a:t>21.07.2025</a:t>
             </a:fld>
             <a:endParaRPr lang="en-US"/>
           </a:p>
@@ -2379,7 +2379,7 @@
           <a:p>
             <a:fld id="{C36ECE8B-8DEC-154E-9F03-047C8DDA20DC}" type="datetime1">
               <a:rPr lang="ru-RU" smtClean="0"/>
-              <a:t>15.07.2025</a:t>
+              <a:t>21.07.2025</a:t>
             </a:fld>
             <a:endParaRPr lang="en-US"/>
           </a:p>
@@ -2746,7 +2746,7 @@
           <a:p>
             <a:fld id="{440816D5-BDB8-B34B-8ACA-ECBDD12E7321}" type="datetime1">
               <a:rPr lang="ru-RU" smtClean="0"/>
-              <a:t>15.07.2025</a:t>
+              <a:t>21.07.2025</a:t>
             </a:fld>
             <a:endParaRPr lang="en-US"/>
           </a:p>
@@ -2864,7 +2864,7 @@
           <a:p>
             <a:fld id="{8A8C589A-5627-764C-AF96-C1E2F9A00A4D}" type="datetime1">
               <a:rPr lang="ru-RU" smtClean="0"/>
-              <a:t>15.07.2025</a:t>
+              <a:t>21.07.2025</a:t>
             </a:fld>
             <a:endParaRPr lang="en-US"/>
           </a:p>
@@ -2959,7 +2959,7 @@
           <a:p>
             <a:fld id="{603EE0D0-1696-6D4F-B917-4AFB24A74E8B}" type="datetime1">
               <a:rPr lang="ru-RU" smtClean="0"/>
-              <a:t>15.07.2025</a:t>
+              <a:t>21.07.2025</a:t>
             </a:fld>
             <a:endParaRPr lang="en-US"/>
           </a:p>
@@ -3236,7 +3236,7 @@
           <a:p>
             <a:fld id="{13C8A91E-B09B-2240-9AA3-B1D4BCC6296E}" type="datetime1">
               <a:rPr lang="ru-RU" smtClean="0"/>
-              <a:t>15.07.2025</a:t>
+              <a:t>21.07.2025</a:t>
             </a:fld>
             <a:endParaRPr lang="en-US"/>
           </a:p>
@@ -3493,7 +3493,7 @@
           <a:p>
             <a:fld id="{3BE9760E-DA8D-6747-B31E-62858C8727B8}" type="datetime1">
               <a:rPr lang="ru-RU" smtClean="0"/>
-              <a:t>15.07.2025</a:t>
+              <a:t>21.07.2025</a:t>
             </a:fld>
             <a:endParaRPr lang="en-US"/>
           </a:p>
@@ -3706,7 +3706,7 @@
           <a:p>
             <a:fld id="{D31305DF-F750-CC43-967D-51A20925EE94}" type="datetime1">
               <a:rPr lang="ru-RU" smtClean="0"/>
-              <a:t>15.07.2025</a:t>
+              <a:t>21.07.2025</a:t>
             </a:fld>
             <a:endParaRPr lang="en-US"/>
           </a:p>
@@ -5058,8 +5058,8 @@
           <a:lstStyle/>
           <a:p>
             <a:r>
-              <a:rPr lang="ru-RU" sz="8000" dirty="0"/>
-              <a:t>Постановка задачи предсказания ВР</a:t>
+              <a:rPr lang="ru-RU" sz="8000" dirty="0" smtClean="0"/>
+              <a:t>Типы временных рядов</a:t>
             </a:r>
             <a:endParaRPr lang="en-US" sz="8000" dirty="0"/>
           </a:p>
@@ -5712,11 +5712,11 @@
   <p:clrMapOvr>
     <a:masterClrMapping/>
   </p:clrMapOvr>
-  <mc:AlternateContent xmlns:mc="http://schemas.openxmlformats.org/markup-compatibility/2006">
-    <mc:Choice xmlns:p14="http://schemas.microsoft.com/office/powerpoint/2010/main" Requires="p14">
+  <mc:AlternateContent xmlns:mc="http://schemas.openxmlformats.org/markup-compatibility/2006" xmlns:p14="http://schemas.microsoft.com/office/powerpoint/2010/main">
+    <mc:Choice Requires="p14">
       <p:transition spd="slow" p14:dur="2000"/>
     </mc:Choice>
-    <mc:Fallback>
+    <mc:Fallback xmlns="">
       <p:transition spd="slow"/>
     </mc:Fallback>
   </mc:AlternateContent>
@@ -7899,7 +7899,7 @@
         </p:nvSpPr>
         <p:spPr>
           <a:xfrm>
-            <a:off x="354336" y="4161595"/>
+            <a:off x="500251" y="3976770"/>
             <a:ext cx="6858000" cy="2208297"/>
           </a:xfrm>
           <a:prstGeom prst="rect">
@@ -7913,7 +7913,7 @@
           </a:bodyPr>
           <a:lstStyle/>
           <a:p>
-            <a:pPr algn="l">
+            <a:pPr marL="285750" indent="-285750" algn="l">
               <a:lnSpc>
                 <a:spcPts val="2143"/>
               </a:lnSpc>
@@ -7925,17 +7925,13 @@
             </a:pPr>
             <a:r>
               <a:rPr lang="ru-RU" b="0" i="0" dirty="0">
-                <a:solidFill>
-                  <a:srgbClr val="404040"/>
-                </a:solidFill>
                 <a:effectLst/>
-                <a:latin typeface="quote-cjk-patch"/>
               </a:rPr>
               <a:t>Эконометрические данные</a:t>
             </a:r>
           </a:p>
           <a:p>
-            <a:pPr algn="l">
+            <a:pPr marL="285750" indent="-285750" algn="l">
               <a:lnSpc>
                 <a:spcPts val="2143"/>
               </a:lnSpc>
@@ -7946,33 +7942,19 @@
               <a:buChar char="•"/>
             </a:pPr>
             <a:r>
-              <a:rPr lang="ru-RU" dirty="0" err="1">
-                <a:solidFill>
-                  <a:srgbClr val="404040"/>
-                </a:solidFill>
-                <a:latin typeface="quote-cjk-patch"/>
-              </a:rPr>
+              <a:rPr lang="ru-RU" dirty="0" err="1"/>
               <a:t>Бизнесс</a:t>
             </a:r>
             <a:r>
-              <a:rPr lang="ru-RU" dirty="0">
-                <a:solidFill>
-                  <a:srgbClr val="404040"/>
-                </a:solidFill>
-                <a:latin typeface="quote-cjk-patch"/>
-              </a:rPr>
+              <a:rPr lang="ru-RU" dirty="0"/>
               <a:t>-данные</a:t>
             </a:r>
             <a:endParaRPr lang="ru-RU" b="0" i="0" dirty="0">
-              <a:solidFill>
-                <a:srgbClr val="404040"/>
-              </a:solidFill>
               <a:effectLst/>
-              <a:latin typeface="quote-cjk-patch"/>
             </a:endParaRPr>
           </a:p>
           <a:p>
-            <a:pPr algn="l">
+            <a:pPr marL="285750" indent="-285750" algn="l">
               <a:lnSpc>
                 <a:spcPts val="2143"/>
               </a:lnSpc>
@@ -7984,17 +7966,13 @@
             </a:pPr>
             <a:r>
               <a:rPr lang="ru-RU" b="0" i="0" dirty="0">
-                <a:solidFill>
-                  <a:srgbClr val="404040"/>
-                </a:solidFill>
                 <a:effectLst/>
-                <a:latin typeface="quote-cjk-patch"/>
               </a:rPr>
               <a:t>Температура и давление в системах отопления.</a:t>
             </a:r>
           </a:p>
           <a:p>
-            <a:pPr algn="l">
+            <a:pPr marL="285750" indent="-285750" algn="l">
               <a:lnSpc>
                 <a:spcPts val="2143"/>
               </a:lnSpc>
@@ -8006,27 +7984,19 @@
             </a:pPr>
             <a:r>
               <a:rPr lang="ru-RU" b="0" i="0" dirty="0">
-                <a:solidFill>
-                  <a:srgbClr val="404040"/>
-                </a:solidFill>
                 <a:effectLst/>
-                <a:latin typeface="quote-cjk-patch"/>
               </a:rPr>
               <a:t>Вибрация подшипников (</a:t>
             </a:r>
             <a:r>
               <a:rPr lang="en" b="0" i="0" dirty="0">
-                <a:solidFill>
-                  <a:srgbClr val="404040"/>
-                </a:solidFill>
                 <a:effectLst/>
-                <a:latin typeface="quote-cjk-patch"/>
               </a:rPr>
               <a:t>NASA Bearing Dataset).</a:t>
             </a:r>
           </a:p>
           <a:p>
-            <a:pPr algn="l">
+            <a:pPr marL="285750" indent="-285750" algn="l">
               <a:lnSpc>
                 <a:spcPts val="2143"/>
               </a:lnSpc>
@@ -8038,17 +8008,13 @@
             </a:pPr>
             <a:r>
               <a:rPr lang="ru-RU" b="0" i="0" dirty="0">
-                <a:solidFill>
-                  <a:srgbClr val="404040"/>
-                </a:solidFill>
                 <a:effectLst/>
-                <a:latin typeface="quote-cjk-patch"/>
               </a:rPr>
               <a:t>Энергопотребление производственных линий.</a:t>
             </a:r>
           </a:p>
           <a:p>
-            <a:pPr algn="l">
+            <a:pPr marL="285750" indent="-285750" algn="l">
               <a:lnSpc>
                 <a:spcPts val="2143"/>
               </a:lnSpc>
@@ -8059,17 +8025,12 @@
               <a:buChar char="•"/>
             </a:pPr>
             <a:r>
-              <a:rPr lang="ru-RU" dirty="0">
-                <a:solidFill>
-                  <a:srgbClr val="404040"/>
-                </a:solidFill>
-                <a:latin typeface="quote-cjk-patch"/>
-              </a:rPr>
+              <a:rPr lang="ru-RU" dirty="0"/>
               <a:t>Погодные данные</a:t>
             </a:r>
           </a:p>
           <a:p>
-            <a:pPr algn="l">
+            <a:pPr marL="285750" indent="-285750" algn="l">
               <a:lnSpc>
                 <a:spcPts val="2143"/>
               </a:lnSpc>
@@ -8081,29 +8042,16 @@
             </a:pPr>
             <a:r>
               <a:rPr lang="ru-RU" b="0" i="0" dirty="0">
-                <a:solidFill>
-                  <a:srgbClr val="404040"/>
-                </a:solidFill>
                 <a:effectLst/>
-                <a:latin typeface="quote-cjk-patch"/>
               </a:rPr>
               <a:t>Поведение человека на </a:t>
             </a:r>
             <a:r>
-              <a:rPr lang="ru-RU" dirty="0">
-                <a:solidFill>
-                  <a:srgbClr val="404040"/>
-                </a:solidFill>
-                <a:latin typeface="quote-cjk-patch"/>
-              </a:rPr>
+              <a:rPr lang="ru-RU" dirty="0"/>
               <a:t>видеопоследовательности</a:t>
             </a:r>
             <a:endParaRPr lang="ru-RU" b="0" i="0" dirty="0">
-              <a:solidFill>
-                <a:srgbClr val="404040"/>
-              </a:solidFill>
               <a:effectLst/>
-              <a:latin typeface="quote-cjk-patch"/>
             </a:endParaRPr>
           </a:p>
         </p:txBody>
@@ -8242,11 +8190,11 @@
   <p:clrMapOvr>
     <a:masterClrMapping/>
   </p:clrMapOvr>
-  <mc:AlternateContent xmlns:mc="http://schemas.openxmlformats.org/markup-compatibility/2006">
-    <mc:Choice xmlns:p14="http://schemas.microsoft.com/office/powerpoint/2010/main" Requires="p14">
+  <mc:AlternateContent xmlns:mc="http://schemas.openxmlformats.org/markup-compatibility/2006" xmlns:p14="http://schemas.microsoft.com/office/powerpoint/2010/main">
+    <mc:Choice Requires="p14">
       <p:transition spd="slow" p14:dur="2000"/>
     </mc:Choice>
-    <mc:Fallback>
+    <mc:Fallback xmlns="">
       <p:transition spd="slow"/>
     </mc:Fallback>
   </mc:AlternateContent>
@@ -8741,11 +8689,11 @@
   <p:clrMapOvr>
     <a:masterClrMapping/>
   </p:clrMapOvr>
-  <mc:AlternateContent xmlns:mc="http://schemas.openxmlformats.org/markup-compatibility/2006">
-    <mc:Choice xmlns:p14="http://schemas.microsoft.com/office/powerpoint/2010/main" Requires="p14">
+  <mc:AlternateContent xmlns:mc="http://schemas.openxmlformats.org/markup-compatibility/2006" xmlns:p14="http://schemas.microsoft.com/office/powerpoint/2010/main">
+    <mc:Choice Requires="p14">
       <p:transition spd="slow" p14:dur="2000"/>
     </mc:Choice>
-    <mc:Fallback>
+    <mc:Fallback xmlns="">
       <p:transition spd="slow"/>
     </mc:Fallback>
   </mc:AlternateContent>
@@ -8978,11 +8926,11 @@
   <p:clrMapOvr>
     <a:masterClrMapping/>
   </p:clrMapOvr>
-  <mc:AlternateContent xmlns:mc="http://schemas.openxmlformats.org/markup-compatibility/2006">
-    <mc:Choice xmlns:p14="http://schemas.microsoft.com/office/powerpoint/2010/main" Requires="p14">
+  <mc:AlternateContent xmlns:mc="http://schemas.openxmlformats.org/markup-compatibility/2006" xmlns:p14="http://schemas.microsoft.com/office/powerpoint/2010/main">
+    <mc:Choice Requires="p14">
       <p:transition spd="slow" p14:dur="2000"/>
     </mc:Choice>
-    <mc:Fallback>
+    <mc:Fallback xmlns="">
       <p:transition spd="slow"/>
     </mc:Fallback>
   </mc:AlternateContent>
@@ -9249,11 +9197,11 @@
   <p:clrMapOvr>
     <a:masterClrMapping/>
   </p:clrMapOvr>
-  <mc:AlternateContent xmlns:mc="http://schemas.openxmlformats.org/markup-compatibility/2006">
-    <mc:Choice xmlns:p14="http://schemas.microsoft.com/office/powerpoint/2010/main" Requires="p14">
+  <mc:AlternateContent xmlns:mc="http://schemas.openxmlformats.org/markup-compatibility/2006" xmlns:p14="http://schemas.microsoft.com/office/powerpoint/2010/main">
+    <mc:Choice Requires="p14">
       <p:transition spd="slow" p14:dur="2000"/>
     </mc:Choice>
-    <mc:Fallback>
+    <mc:Fallback xmlns="">
       <p:transition spd="slow"/>
     </mc:Fallback>
   </mc:AlternateContent>
@@ -9494,11 +9442,11 @@
   <p:clrMapOvr>
     <a:masterClrMapping/>
   </p:clrMapOvr>
-  <mc:AlternateContent xmlns:mc="http://schemas.openxmlformats.org/markup-compatibility/2006">
-    <mc:Choice xmlns:p14="http://schemas.microsoft.com/office/powerpoint/2010/main" Requires="p14">
+  <mc:AlternateContent xmlns:mc="http://schemas.openxmlformats.org/markup-compatibility/2006" xmlns:p14="http://schemas.microsoft.com/office/powerpoint/2010/main">
+    <mc:Choice Requires="p14">
       <p:transition spd="slow" p14:dur="2000"/>
     </mc:Choice>
-    <mc:Fallback>
+    <mc:Fallback xmlns="">
       <p:transition spd="slow"/>
     </mc:Fallback>
   </mc:AlternateContent>
@@ -9735,11 +9683,11 @@
   <p:clrMapOvr>
     <a:masterClrMapping/>
   </p:clrMapOvr>
-  <mc:AlternateContent xmlns:mc="http://schemas.openxmlformats.org/markup-compatibility/2006">
-    <mc:Choice xmlns:p14="http://schemas.microsoft.com/office/powerpoint/2010/main" Requires="p14">
+  <mc:AlternateContent xmlns:mc="http://schemas.openxmlformats.org/markup-compatibility/2006" xmlns:p14="http://schemas.microsoft.com/office/powerpoint/2010/main">
+    <mc:Choice Requires="p14">
       <p:transition spd="slow" p14:dur="2000"/>
     </mc:Choice>
-    <mc:Fallback>
+    <mc:Fallback xmlns="">
       <p:transition spd="slow"/>
     </mc:Fallback>
   </mc:AlternateContent>
@@ -10056,11 +10004,11 @@
   <p:clrMapOvr>
     <a:masterClrMapping/>
   </p:clrMapOvr>
-  <mc:AlternateContent xmlns:mc="http://schemas.openxmlformats.org/markup-compatibility/2006">
-    <mc:Choice xmlns:p14="http://schemas.microsoft.com/office/powerpoint/2010/main" Requires="p14">
+  <mc:AlternateContent xmlns:mc="http://schemas.openxmlformats.org/markup-compatibility/2006" xmlns:p14="http://schemas.microsoft.com/office/powerpoint/2010/main">
+    <mc:Choice Requires="p14">
       <p:transition spd="slow" p14:dur="2000"/>
     </mc:Choice>
-    <mc:Fallback>
+    <mc:Fallback xmlns="">
       <p:transition spd="slow"/>
     </mc:Fallback>
   </mc:AlternateContent>
@@ -10905,8 +10853,12 @@
           <a:p>
             <a:pPr algn="ctr"/>
             <a:r>
+              <a:rPr lang="ru-RU" dirty="0" smtClean="0"/>
+              <a:t>Краткосрочные </a:t>
+            </a:r>
+            <a:r>
               <a:rPr lang="ru-RU" dirty="0"/>
-              <a:t>краткосрочные прогнозы спроса на электроэнергию в жилых домах</a:t>
+              <a:t>прогнозы спроса на электроэнергию в жилых домах</a:t>
             </a:r>
           </a:p>
         </p:txBody>
@@ -11083,7 +11035,7 @@
         </p:blipFill>
         <p:spPr>
           <a:xfrm>
-            <a:off x="6258977" y="3281807"/>
+            <a:off x="6258977" y="3387530"/>
             <a:ext cx="5577003" cy="3333945"/>
           </a:xfrm>
           <a:prstGeom prst="rect">
